--- a/docs/Presentacion_T1_UPC_GRUPO06.pptx
+++ b/docs/Presentacion_T1_UPC_GRUPO06.pptx
@@ -3233,7 +3233,7 @@
         <p:spPr>
           <a:xfrm>
             <a:off x="868680" y="1691640"/>
-            <a:ext cx="10515600" cy="3441968"/>
+            <a:ext cx="10515600" cy="4652556"/>
           </a:xfrm>
           <a:prstGeom prst="rect">
             <a:avLst/>
@@ -3425,6 +3425,46 @@
               <a:rPr lang="es-PE" sz="2100" b="1" dirty="0"/>
               <a:t>e202527900 </a:t>
             </a:r>
+          </a:p>
+          <a:p>
+            <a:pPr lvl="3">
+              <a:spcAft>
+                <a:spcPts val="2200"/>
+              </a:spcAft>
+              <a:defRPr sz="2100">
+                <a:solidFill>
+                  <a:srgbClr val="212F3C"/>
+                </a:solidFill>
+              </a:defRPr>
+            </a:pPr>
+            <a:r>
+              <a:rPr lang="es-PE" sz="2100" dirty="0" err="1"/>
+              <a:t>Jheremy</a:t>
+            </a:r>
+            <a:r>
+              <a:rPr lang="es-PE" sz="2100" dirty="0"/>
+              <a:t> Richard </a:t>
+            </a:r>
+            <a:r>
+              <a:rPr lang="es-PE" sz="2100" dirty="0" err="1"/>
+              <a:t>Molleapaza</a:t>
+            </a:r>
+            <a:r>
+              <a:rPr lang="es-PE" sz="2100" dirty="0"/>
+              <a:t> Infantes</a:t>
+            </a:r>
+          </a:p>
+          <a:p>
+            <a:pPr>
+              <a:spcAft>
+                <a:spcPts val="2200"/>
+              </a:spcAft>
+              <a:defRPr sz="2100">
+                <a:solidFill>
+                  <a:srgbClr val="212F3C"/>
+                </a:solidFill>
+              </a:defRPr>
+            </a:pPr>
             <a:endParaRPr b="1" dirty="0"/>
           </a:p>
         </p:txBody>
